--- a/system-design-101/vi/lessons/sd-02-007/slides/sd-02-007.pptx
+++ b/system-design-101/vi/lessons/sd-02-007/slides/sd-02-007.pptx
@@ -1790,7 +1790,7 @@
         <p:spPr>
           <a:xfrm>
             <a:off x="914400" y="1428750"/>
-            <a:ext cx="9334500" cy="3619500"/>
+            <a:ext cx="9334500" cy="4381500"/>
           </a:xfrm>
           <a:prstGeom prst="rect">
             <a:avLst/>
@@ -1799,17 +1799,17 @@
           <a:ln/>
         </p:spPr>
         <p:txBody>
-          <a:bodyPr wrap="square" lIns="0" tIns="66675" rIns="0" bIns="-66675" rtlCol="0" anchor="t"/>
+          <a:bodyPr wrap="square" lIns="0" tIns="72009" rIns="0" bIns="-72009" rtlCol="0" anchor="t"/>
           <a:lstStyle/>
           <a:p>
             <a:pPr algn="l" indent="0" marL="0">
               <a:lnSpc>
-                <a:spcPts val="7800"/>
+                <a:spcPts val="8424"/>
               </a:lnSpc>
               <a:buNone/>
             </a:pPr>
             <a:r>
-              <a:rPr lang="en-US" sz="7500" dirty="0" spc="-13" kern="0">
+              <a:rPr lang="en-US" sz="8100" dirty="0" spc="-15" kern="0">
                 <a:solidFill>
                   <a:srgbClr val="F3EEE3"/>
                 </a:solidFill>
@@ -1820,7 +1820,7 @@
               <a:t>McDonald's:</a:t>
             </a:r>
             <a:r>
-              <a:rPr lang="en-US" sz="7500" dirty="0" spc="1" kern="0">
+              <a:rPr lang="en-US" sz="8100" dirty="0" spc="0" kern="0">
                 <a:solidFill>
                   <a:srgbClr val="F3EEE3"/>
                 </a:solidFill>
@@ -1831,7 +1831,7 @@
               <a:t> chuẩn</a:t>
             </a:r>
             <a:r>
-              <a:rPr lang="en-US" sz="7500" dirty="0" spc="-9" kern="0">
+              <a:rPr lang="en-US" sz="8100" dirty="0" spc="-10" kern="0">
                 <a:solidFill>
                   <a:srgbClr val="F3EEE3"/>
                 </a:solidFill>
@@ -1842,7 +1842,7 @@
               <a:t> hóa</a:t>
             </a:r>
             <a:r>
-              <a:rPr lang="en-US" sz="7500" dirty="0" spc="-1" kern="0">
+              <a:rPr lang="en-US" sz="8100" dirty="0" spc="-2" kern="0">
                 <a:solidFill>
                   <a:srgbClr val="F3EEE3"/>
                 </a:solidFill>
@@ -1853,7 +1853,7 @@
               <a:t> sự</a:t>
             </a:r>
             <a:r>
-              <a:rPr lang="en-US" sz="7500" dirty="0" spc="3" kern="0">
+              <a:rPr lang="en-US" sz="8100" dirty="0" spc="0" kern="0">
                 <a:solidFill>
                   <a:srgbClr val="F3EEE3"/>
                 </a:solidFill>
@@ -1864,7 +1864,7 @@
               <a:t> kiện</a:t>
             </a:r>
             <a:r>
-              <a:rPr lang="en-US" sz="7500" dirty="0" spc="-72" kern="0">
+              <a:rPr lang="en-US" sz="8100" dirty="0" spc="-76" kern="0">
                 <a:solidFill>
                   <a:srgbClr val="F3EEE3"/>
                 </a:solidFill>
@@ -1875,7 +1875,7 @@
               <a:t> trước,</a:t>
             </a:r>
             <a:r>
-              <a:rPr lang="en-US" sz="7500" dirty="0" spc="2" kern="0">
+              <a:rPr lang="en-US" sz="8100" dirty="0" spc="-2" kern="0">
                 <a:solidFill>
                   <a:srgbClr val="F3EEE3"/>
                 </a:solidFill>
@@ -1886,7 +1886,7 @@
               <a:t> mở</a:t>
             </a:r>
             <a:r>
-              <a:rPr lang="en-US" sz="7500" dirty="0" spc="-17" kern="0">
+              <a:rPr lang="en-US" sz="8100" dirty="0" spc="-19" kern="0">
                 <a:solidFill>
                   <a:srgbClr val="F3EEE3"/>
                 </a:solidFill>
@@ -1897,7 +1897,7 @@
               <a:t> rộng</a:t>
             </a:r>
             <a:r>
-              <a:rPr lang="en-US" sz="7500" dirty="0" spc="0" kern="0">
+              <a:rPr lang="en-US" sz="8100" dirty="0" spc="-3" kern="0">
                 <a:solidFill>
                   <a:srgbClr val="F3EEE3"/>
                 </a:solidFill>
@@ -1907,7 +1907,7 @@
               </a:rPr>
               <a:t> sau</a:t>
             </a:r>
-            <a:endParaRPr lang="en-US" sz="7500" dirty="0"/>
+            <a:endParaRPr lang="en-US" sz="8100" dirty="0"/>
           </a:p>
         </p:txBody>
       </p:sp>
@@ -1919,7 +1919,7 @@
         </p:nvSpPr>
         <p:spPr>
           <a:xfrm>
-            <a:off x="914400" y="5524500"/>
+            <a:off x="914400" y="6191250"/>
             <a:ext cx="8572500" cy="1143000"/>
           </a:xfrm>
           <a:prstGeom prst="rect">
@@ -2049,7 +2049,7 @@
         </p:nvSpPr>
         <p:spPr>
           <a:xfrm>
-            <a:off x="914400" y="7048500"/>
+            <a:off x="914400" y="7620000"/>
             <a:ext cx="8610600" cy="0"/>
           </a:xfrm>
           <a:prstGeom prst="line">
@@ -2074,7 +2074,7 @@
         </p:nvSpPr>
         <p:spPr>
           <a:xfrm>
-            <a:off x="914400" y="7334250"/>
+            <a:off x="914400" y="7858125"/>
             <a:ext cx="8572500" cy="457200"/>
           </a:xfrm>
           <a:prstGeom prst="rect">

--- a/system-design-101/vi/lessons/sd-02-007/slides/sd-02-007.pptx
+++ b/system-design-101/vi/lessons/sd-02-007/slides/sd-02-007.pptx
@@ -9047,10 +9047,10 @@
                 <a:ea typeface="Bricolage Grotesque ExtraBold" pitchFamily="34" charset="-122"/>
                 <a:cs typeface="Bricolage Grotesque ExtraBold" pitchFamily="34" charset="-120"/>
               </a:rPr>
-              <a:t> kiện từ</a:t>
-            </a:r>
-            <a:r>
-              <a:rPr lang="en-US" sz="3600" dirty="0" spc="-4" kern="0">
+              <a:t> kiện</a:t>
+            </a:r>
+            <a:r>
+              <a:rPr lang="en-US" sz="3600" dirty="0" spc="-32" kern="0">
                 <a:solidFill>
                   <a:srgbClr val="14161C"/>
                 </a:solidFill>
@@ -9058,10 +9058,10 @@
                 <a:ea typeface="Bricolage Grotesque ExtraBold" pitchFamily="34" charset="-122"/>
                 <a:cs typeface="Bricolage Grotesque ExtraBold" pitchFamily="34" charset="-120"/>
               </a:rPr>
-              <a:t> một</a:t>
-            </a:r>
-            <a:r>
-              <a:rPr lang="en-US" sz="3600" dirty="0" spc="9" kern="0">
+              <a:t> tới</a:t>
+            </a:r>
+            <a:r>
+              <a:rPr lang="en-US" sz="3600" dirty="0" spc="3" kern="0">
                 <a:solidFill>
                   <a:srgbClr val="14161C"/>
                 </a:solidFill>
@@ -9069,7 +9069,7 @@
                 <a:ea typeface="Bricolage Grotesque ExtraBold" pitchFamily="34" charset="-122"/>
                 <a:cs typeface="Bricolage Grotesque ExtraBold" pitchFamily="34" charset="-120"/>
               </a:rPr>
-              <a:t> đội</a:t>
+              <a:t> cổng</a:t>
             </a:r>
             <a:endParaRPr lang="en-US" sz="3600" dirty="0"/>
           </a:p>
@@ -9436,7 +9436,7 @@
               <a:buNone/>
             </a:pPr>
             <a:r>
-              <a:rPr lang="en-US" sz="2058" b="1" dirty="0" spc="-13" kern="0">
+              <a:rPr lang="en-US" sz="2058" b="1" dirty="0" spc="11" kern="0">
                 <a:solidFill>
                   <a:srgbClr val="14161C"/>
                 </a:solidFill>
@@ -9444,10 +9444,10 @@
                 <a:ea typeface="Be Vietnam Pro" pitchFamily="34" charset="-122"/>
                 <a:cs typeface="Be Vietnam Pro" pitchFamily="34" charset="-120"/>
               </a:rPr>
-              <a:t>vào</a:t>
-            </a:r>
-            <a:r>
-              <a:rPr lang="en-US" sz="2058" b="1" dirty="0" spc="-5" kern="0">
+              <a:t>được</a:t>
+            </a:r>
+            <a:r>
+              <a:rPr lang="en-US" sz="2058" b="1" dirty="0" spc="1" kern="0">
                 <a:solidFill>
                   <a:srgbClr val="14161C"/>
                 </a:solidFill>
@@ -9455,18 +9455,7 @@
                 <a:ea typeface="Be Vietnam Pro" pitchFamily="34" charset="-122"/>
                 <a:cs typeface="Be Vietnam Pro" pitchFamily="34" charset="-120"/>
               </a:rPr>
-              <a:t> hệ</a:t>
-            </a:r>
-            <a:r>
-              <a:rPr lang="en-US" sz="2058" b="1" dirty="0" spc="-3" kern="0">
-                <a:solidFill>
-                  <a:srgbClr val="14161C"/>
-                </a:solidFill>
-                <a:latin typeface="Be Vietnam Pro" pitchFamily="34" charset="0"/>
-                <a:ea typeface="Be Vietnam Pro" pitchFamily="34" charset="-122"/>
-                <a:cs typeface="Be Vietnam Pro" pitchFamily="34" charset="-120"/>
-              </a:rPr>
-              <a:t> thống</a:t>
+              <a:t> nhận</a:t>
             </a:r>
             <a:endParaRPr lang="en-US" sz="2058" dirty="0"/>
           </a:p>
@@ -13305,6 +13294,28 @@
               <a:buChar char="•"/>
             </a:pPr>
             <a:r>
+              <a:rPr lang="en-US" sz="2700" dirty="0" spc="-5" kern="0">
+                <a:solidFill>
+                  <a:srgbClr val="14161C"/>
+                </a:solidFill>
+                <a:latin typeface="Be Vietnam Pro" pitchFamily="34" charset="0"/>
+                <a:ea typeface="Be Vietnam Pro" pitchFamily="34" charset="-122"/>
+                <a:cs typeface="Be Vietnam Pro" pitchFamily="34" charset="-120"/>
+              </a:rPr>
+              <a:t>Bên</a:t>
+            </a:r>
+            <a:r>
+              <a:rPr lang="en-US" sz="2700" dirty="0" spc="-11" kern="0">
+                <a:solidFill>
+                  <a:srgbClr val="14161C"/>
+                </a:solidFill>
+                <a:latin typeface="Be Vietnam Pro" pitchFamily="34" charset="0"/>
+                <a:ea typeface="Be Vietnam Pro" pitchFamily="34" charset="-122"/>
+                <a:cs typeface="Be Vietnam Pro" pitchFamily="34" charset="-120"/>
+              </a:rPr>
+              <a:t> phát</a:t>
+            </a:r>
+            <a:r>
               <a:rPr lang="en-US" sz="2700" dirty="0" spc="-1" kern="0">
                 <a:solidFill>
                   <a:srgbClr val="14161C"/>
@@ -13313,10 +13324,10 @@
                 <a:ea typeface="Be Vietnam Pro" pitchFamily="34" charset="-122"/>
                 <a:cs typeface="Be Vietnam Pro" pitchFamily="34" charset="-120"/>
               </a:rPr>
-              <a:t>Sự</a:t>
-            </a:r>
-            <a:r>
-              <a:rPr lang="en-US" sz="2700" dirty="0" spc="-3" kern="0">
+              <a:t> phải</a:t>
+            </a:r>
+            <a:r>
+              <a:rPr lang="en-US" sz="2700" dirty="0" spc="-7" kern="0">
                 <a:solidFill>
                   <a:srgbClr val="14161C"/>
                 </a:solidFill>
@@ -13324,7 +13335,7 @@
                 <a:ea typeface="Be Vietnam Pro" pitchFamily="34" charset="-122"/>
                 <a:cs typeface="Be Vietnam Pro" pitchFamily="34" charset="-120"/>
               </a:rPr>
-              <a:t> kiện</a:t>
+              <a:t> biết</a:t>
             </a:r>
             <a:r>
               <a:rPr lang="en-US" sz="2700" dirty="0" spc="-2" kern="0">
@@ -13335,10 +13346,10 @@
                 <a:ea typeface="Be Vietnam Pro" pitchFamily="34" charset="-122"/>
                 <a:cs typeface="Be Vietnam Pro" pitchFamily="34" charset="-120"/>
               </a:rPr>
-              <a:t> hai</a:t>
-            </a:r>
-            <a:r>
-              <a:rPr lang="en-US" sz="2700" dirty="0" spc="-3" kern="0">
+              <a:t> miền</a:t>
+            </a:r>
+            <a:r>
+              <a:rPr lang="en-US" sz="2700" dirty="0" spc="14" kern="0">
                 <a:solidFill>
                   <a:srgbClr val="14161C"/>
                 </a:solidFill>
@@ -13346,7 +13357,7 @@
                 <a:ea typeface="Be Vietnam Pro" pitchFamily="34" charset="-122"/>
                 <a:cs typeface="Be Vietnam Pro" pitchFamily="34" charset="-120"/>
               </a:rPr>
-              <a:t> miền</a:t>
+              <a:t> để</a:t>
             </a:r>
             <a:r>
               <a:rPr lang="en-US" sz="2700" dirty="0" spc="-1" kern="0">
@@ -13357,29 +13368,7 @@
                 <a:ea typeface="Be Vietnam Pro" pitchFamily="34" charset="-122"/>
                 <a:cs typeface="Be Vietnam Pro" pitchFamily="34" charset="-120"/>
               </a:rPr>
-              <a:t> phải</a:t>
-            </a:r>
-            <a:r>
-              <a:rPr lang="en-US" sz="2700" dirty="0" spc="-2" kern="0">
-                <a:solidFill>
-                  <a:srgbClr val="14161C"/>
-                </a:solidFill>
-                <a:latin typeface="Be Vietnam Pro" pitchFamily="34" charset="0"/>
-                <a:ea typeface="Be Vietnam Pro" pitchFamily="34" charset="-122"/>
-                <a:cs typeface="Be Vietnam Pro" pitchFamily="34" charset="-120"/>
-              </a:rPr>
-              <a:t> qua hai</a:t>
-            </a:r>
-            <a:r>
-              <a:rPr lang="en-US" sz="2700" dirty="0" spc="-3" kern="0">
-                <a:solidFill>
-                  <a:srgbClr val="14161C"/>
-                </a:solidFill>
-                <a:latin typeface="Be Vietnam Pro" pitchFamily="34" charset="0"/>
-                <a:ea typeface="Be Vietnam Pro" pitchFamily="34" charset="-122"/>
-                <a:cs typeface="Be Vietnam Pro" pitchFamily="34" charset="-120"/>
-              </a:rPr>
-              <a:t> nơi.</a:t>
+              <a:t> chọn cụm.</a:t>
             </a:r>
             <a:endParaRPr lang="en-US" sz="2700" dirty="0"/>
           </a:p>

--- a/system-design-101/vi/lessons/sd-02-007/slides/sd-02-007.pptx
+++ b/system-design-101/vi/lessons/sd-02-007/slides/sd-02-007.pptx
@@ -4214,10 +4214,10 @@
                           <a:ea typeface="Be Vietnam Pro" pitchFamily="34" charset="-122"/>
                           <a:cs typeface="Be Vietnam Pro" pitchFamily="34" charset="-120"/>
                         </a:rPr>
-                        <a:t> co</a:t>
+                        <a:t> mở</a:t>
                       </a:r>
                       <a:r>
-                        <a:rPr lang="en-US" sz="2250" dirty="0" spc="-2" kern="0">
+                        <a:rPr lang="en-US" sz="2250" dirty="0" spc="-17" kern="0">
                           <a:solidFill>
                             <a:srgbClr val="E4E1D8"/>
                           </a:solidFill>
@@ -4225,7 +4225,7 @@
                           <a:ea typeface="Be Vietnam Pro" pitchFamily="34" charset="-122"/>
                           <a:cs typeface="Be Vietnam Pro" pitchFamily="34" charset="-120"/>
                         </a:rPr>
-                        <a:t> giãn</a:t>
+                        <a:t> rộng</a:t>
                       </a:r>
                       <a:endParaRPr lang="en-US" sz="1200" dirty="0"/>
                     </a:p>
@@ -11392,7 +11392,7 @@
               <a:t> theo miền,</a:t>
             </a:r>
             <a:r>
-              <a:rPr lang="en-US" sz="6600" dirty="0" spc="1" kern="0">
+              <a:rPr lang="en-US" sz="6600" dirty="0" spc="2" kern="0">
                 <a:solidFill>
                   <a:srgbClr val="F3EEE3"/>
                 </a:solidFill>
@@ -11400,10 +11400,10 @@
                 <a:ea typeface="Bricolage Grotesque ExtraBold" pitchFamily="34" charset="-122"/>
                 <a:cs typeface="Bricolage Grotesque ExtraBold" pitchFamily="34" charset="-120"/>
               </a:rPr>
-              <a:t> co</a:t>
-            </a:r>
-            <a:r>
-              <a:rPr lang="en-US" sz="6600" dirty="0" spc="-2" kern="0">
+              <a:t> tự mở</a:t>
+            </a:r>
+            <a:r>
+              <a:rPr lang="en-US" sz="6600" dirty="0" spc="-15" kern="0">
                 <a:solidFill>
                   <a:srgbClr val="F3EEE3"/>
                 </a:solidFill>
@@ -11411,10 +11411,10 @@
                 <a:ea typeface="Bricolage Grotesque ExtraBold" pitchFamily="34" charset="-122"/>
                 <a:cs typeface="Bricolage Grotesque ExtraBold" pitchFamily="34" charset="-120"/>
               </a:rPr>
-              <a:t> giãn</a:t>
-            </a:r>
-            <a:r>
-              <a:rPr lang="en-US" sz="6600" dirty="0" spc="0" kern="0">
+              <a:t> rộng</a:t>
+            </a:r>
+            <a:r>
+              <a:rPr lang="en-US" sz="6600" dirty="0" spc="1" kern="0">
                 <a:solidFill>
                   <a:srgbClr val="F3EEE3"/>
                 </a:solidFill>
@@ -12097,10 +12097,10 @@
                 <a:ea typeface="Be Vietnam Pro" pitchFamily="34" charset="-122"/>
                 <a:cs typeface="Be Vietnam Pro" pitchFamily="34" charset="-120"/>
               </a:rPr>
-              <a:t> tự co</a:t>
-            </a:r>
-            <a:r>
-              <a:rPr lang="en-US" sz="2700" dirty="0" spc="-2" kern="0">
+              <a:t> tự</a:t>
+            </a:r>
+            <a:r>
+              <a:rPr lang="en-US" sz="2700" dirty="0" spc="-3" kern="0">
                 <a:solidFill>
                   <a:srgbClr val="14161C"/>
                 </a:solidFill>
@@ -12108,7 +12108,29 @@
                 <a:ea typeface="Be Vietnam Pro" pitchFamily="34" charset="-122"/>
                 <a:cs typeface="Be Vietnam Pro" pitchFamily="34" charset="-120"/>
               </a:rPr>
-              <a:t> giãn theo</a:t>
+              <a:t> mở</a:t>
+            </a:r>
+            <a:r>
+              <a:rPr lang="en-US" sz="2700" dirty="0" spc="-24" kern="0">
+                <a:solidFill>
+                  <a:srgbClr val="14161C"/>
+                </a:solidFill>
+                <a:latin typeface="Be Vietnam Pro" pitchFamily="34" charset="0"/>
+                <a:ea typeface="Be Vietnam Pro" pitchFamily="34" charset="-122"/>
+                <a:cs typeface="Be Vietnam Pro" pitchFamily="34" charset="-120"/>
+              </a:rPr>
+              <a:t> rộng</a:t>
+            </a:r>
+            <a:r>
+              <a:rPr lang="en-US" sz="2700" dirty="0" spc="-3" kern="0">
+                <a:solidFill>
+                  <a:srgbClr val="14161C"/>
+                </a:solidFill>
+                <a:latin typeface="Be Vietnam Pro" pitchFamily="34" charset="0"/>
+                <a:ea typeface="Be Vietnam Pro" pitchFamily="34" charset="-122"/>
+                <a:cs typeface="Be Vietnam Pro" pitchFamily="34" charset="-120"/>
+              </a:rPr>
+              <a:t> theo</a:t>
             </a:r>
             <a:r>
               <a:rPr lang="en-US" sz="2700" dirty="0" spc="-1" kern="0">
@@ -12994,10 +13016,32 @@
                 <a:ea typeface="Be Vietnam Pro" pitchFamily="34" charset="-122"/>
                 <a:cs typeface="Be Vietnam Pro" pitchFamily="34" charset="-120"/>
               </a:rPr>
-              <a:t> cụm co giãn</a:t>
-            </a:r>
-            <a:r>
-              <a:rPr lang="en-US" sz="2700" dirty="0" spc="-3" kern="0">
+              <a:t> cụm tự</a:t>
+            </a:r>
+            <a:r>
+              <a:rPr lang="en-US" sz="2700" dirty="0" spc="-2" kern="0">
+                <a:solidFill>
+                  <a:srgbClr val="F3EEE3"/>
+                </a:solidFill>
+                <a:latin typeface="Be Vietnam Pro" pitchFamily="34" charset="0"/>
+                <a:ea typeface="Be Vietnam Pro" pitchFamily="34" charset="-122"/>
+                <a:cs typeface="Be Vietnam Pro" pitchFamily="34" charset="-120"/>
+              </a:rPr>
+              <a:t> mở</a:t>
+            </a:r>
+            <a:r>
+              <a:rPr lang="en-US" sz="2700" dirty="0" spc="-25" kern="0">
+                <a:solidFill>
+                  <a:srgbClr val="F3EEE3"/>
+                </a:solidFill>
+                <a:latin typeface="Be Vietnam Pro" pitchFamily="34" charset="0"/>
+                <a:ea typeface="Be Vietnam Pro" pitchFamily="34" charset="-122"/>
+                <a:cs typeface="Be Vietnam Pro" pitchFamily="34" charset="-120"/>
+              </a:rPr>
+              <a:t> rộng</a:t>
+            </a:r>
+            <a:r>
+              <a:rPr lang="en-US" sz="2700" dirty="0" spc="-2" kern="0">
                 <a:solidFill>
                   <a:srgbClr val="F3EEE3"/>
                 </a:solidFill>

--- a/system-design-101/vi/lessons/sd-02-007/slides/sd-02-007.pptx
+++ b/system-design-101/vi/lessons/sd-02-007/slides/sd-02-007.pptx
@@ -1864,7 +1864,7 @@
               <a:t> kiện</a:t>
             </a:r>
             <a:r>
-              <a:rPr lang="en-US" sz="8100" dirty="0" spc="-76" kern="0">
+              <a:rPr lang="en-US" sz="8100" dirty="0" spc="-86" kern="0">
                 <a:solidFill>
                   <a:srgbClr val="F3EEE3"/>
                 </a:solidFill>
@@ -1872,7 +1872,7 @@
                 <a:ea typeface="Bricolage Grotesque ExtraBold" pitchFamily="34" charset="-122"/>
                 <a:cs typeface="Bricolage Grotesque ExtraBold" pitchFamily="34" charset="-120"/>
               </a:rPr>
-              <a:t> trước,</a:t>
+              <a:t> và</a:t>
             </a:r>
             <a:r>
               <a:rPr lang="en-US" sz="8100" dirty="0" spc="-2" kern="0">
@@ -1895,17 +1895,6 @@
                 <a:cs typeface="Bricolage Grotesque ExtraBold" pitchFamily="34" charset="-120"/>
               </a:rPr>
               <a:t> rộng</a:t>
-            </a:r>
-            <a:r>
-              <a:rPr lang="en-US" sz="8100" dirty="0" spc="-3" kern="0">
-                <a:solidFill>
-                  <a:srgbClr val="F3EEE3"/>
-                </a:solidFill>
-                <a:latin typeface="Bricolage Grotesque ExtraBold" pitchFamily="34" charset="0"/>
-                <a:ea typeface="Bricolage Grotesque ExtraBold" pitchFamily="34" charset="-122"/>
-                <a:cs typeface="Bricolage Grotesque ExtraBold" pitchFamily="34" charset="-120"/>
-              </a:rPr>
-              <a:t> sau</a:t>
             </a:r>
             <a:endParaRPr lang="en-US" sz="8100" dirty="0"/>
           </a:p>
@@ -5450,6 +5439,72 @@
               <a:buChar char="•"/>
             </a:pPr>
             <a:r>
+              <a:rPr lang="en-US" sz="2850" dirty="0" spc="-2" kern="0">
+                <a:solidFill>
+                  <a:srgbClr val="14161C"/>
+                </a:solidFill>
+                <a:latin typeface="Be Vietnam Pro" pitchFamily="34" charset="0"/>
+                <a:ea typeface="Be Vietnam Pro" pitchFamily="34" charset="-122"/>
+                <a:cs typeface="Be Vietnam Pro" pitchFamily="34" charset="-120"/>
+              </a:rPr>
+              <a:t>Cách</a:t>
+            </a:r>
+            <a:r>
+              <a:rPr lang="en-US" sz="2850" dirty="0" spc="-13" kern="0">
+                <a:solidFill>
+                  <a:srgbClr val="14161C"/>
+                </a:solidFill>
+                <a:latin typeface="Be Vietnam Pro" pitchFamily="34" charset="0"/>
+                <a:ea typeface="Be Vietnam Pro" pitchFamily="34" charset="-122"/>
+                <a:cs typeface="Be Vietnam Pro" pitchFamily="34" charset="-120"/>
+              </a:rPr>
+              <a:t> tách</a:t>
+            </a:r>
+            <a:r>
+              <a:rPr lang="en-US" sz="2850" dirty="0" spc="3" kern="0">
+                <a:solidFill>
+                  <a:srgbClr val="14161C"/>
+                </a:solidFill>
+                <a:latin typeface="Be Vietnam Pro" pitchFamily="34" charset="0"/>
+                <a:ea typeface="Be Vietnam Pro" pitchFamily="34" charset="-122"/>
+                <a:cs typeface="Be Vietnam Pro" pitchFamily="34" charset="-120"/>
+              </a:rPr>
+              <a:t> hai</a:t>
+            </a:r>
+            <a:r>
+              <a:rPr lang="en-US" sz="2850" dirty="0" spc="0" kern="0">
+                <a:solidFill>
+                  <a:srgbClr val="14161C"/>
+                </a:solidFill>
+                <a:latin typeface="Be Vietnam Pro" pitchFamily="34" charset="0"/>
+                <a:ea typeface="Be Vietnam Pro" pitchFamily="34" charset="-122"/>
+                <a:cs typeface="Be Vietnam Pro" pitchFamily="34" charset="-120"/>
+              </a:rPr>
+              <a:t> lớp</a:t>
+            </a:r>
+            <a:r>
+              <a:rPr lang="en-US" sz="2850" dirty="0" spc="2" kern="0">
+                <a:solidFill>
+                  <a:srgbClr val="14161C"/>
+                </a:solidFill>
+                <a:latin typeface="Be Vietnam Pro" pitchFamily="34" charset="0"/>
+                <a:ea typeface="Be Vietnam Pro" pitchFamily="34" charset="-122"/>
+                <a:cs typeface="Be Vietnam Pro" pitchFamily="34" charset="-120"/>
+              </a:rPr>
+              <a:t> là</a:t>
+            </a:r>
+            <a:r>
+              <a:rPr lang="en-US" sz="2850" dirty="0" spc="1" kern="0">
+                <a:solidFill>
+                  <a:srgbClr val="14161C"/>
+                </a:solidFill>
+                <a:latin typeface="Be Vietnam Pro" pitchFamily="34" charset="0"/>
+                <a:ea typeface="Be Vietnam Pro" pitchFamily="34" charset="-122"/>
+                <a:cs typeface="Be Vietnam Pro" pitchFamily="34" charset="-120"/>
+              </a:rPr>
+              <a:t> của</a:t>
+            </a:r>
+            <a:r>
               <a:rPr lang="en-US" sz="2850" dirty="0" spc="-3" kern="0">
                 <a:solidFill>
                   <a:srgbClr val="14161C"/>
@@ -5458,73 +5513,18 @@
                 <a:ea typeface="Be Vietnam Pro" pitchFamily="34" charset="-122"/>
                 <a:cs typeface="Be Vietnam Pro" pitchFamily="34" charset="-120"/>
               </a:rPr>
-              <a:t>Theo</a:t>
-            </a:r>
-            <a:r>
-              <a:rPr lang="en-US" sz="2850" dirty="0" spc="-2" kern="0">
-                <a:solidFill>
-                  <a:srgbClr val="14161C"/>
-                </a:solidFill>
-                <a:latin typeface="Be Vietnam Pro" pitchFamily="34" charset="0"/>
-                <a:ea typeface="Be Vietnam Pro" pitchFamily="34" charset="-122"/>
-                <a:cs typeface="Be Vietnam Pro" pitchFamily="34" charset="-120"/>
-              </a:rPr>
-              <a:t> nguồn,</a:t>
-            </a:r>
-            <a:r>
-              <a:rPr lang="en-US" sz="2850" dirty="0" spc="1" kern="0">
-                <a:solidFill>
-                  <a:srgbClr val="14161C"/>
-                </a:solidFill>
-                <a:latin typeface="Be Vietnam Pro" pitchFamily="34" charset="0"/>
-                <a:ea typeface="Be Vietnam Pro" pitchFamily="34" charset="-122"/>
-                <a:cs typeface="Be Vietnam Pro" pitchFamily="34" charset="-120"/>
-              </a:rPr>
-              <a:t> McDonald's</a:t>
-            </a:r>
-            <a:r>
-              <a:rPr lang="en-US" sz="2850" dirty="0" spc="-1" kern="0">
-                <a:solidFill>
-                  <a:srgbClr val="14161C"/>
-                </a:solidFill>
-                <a:latin typeface="Be Vietnam Pro" pitchFamily="34" charset="0"/>
-                <a:ea typeface="Be Vietnam Pro" pitchFamily="34" charset="-122"/>
-                <a:cs typeface="Be Vietnam Pro" pitchFamily="34" charset="-120"/>
-              </a:rPr>
-              <a:t> làm</a:t>
-            </a:r>
-            <a:r>
-              <a:rPr lang="en-US" sz="2850" dirty="0" spc="0" kern="0">
-                <a:solidFill>
-                  <a:srgbClr val="14161C"/>
-                </a:solidFill>
-                <a:latin typeface="Be Vietnam Pro" pitchFamily="34" charset="0"/>
-                <a:ea typeface="Be Vietnam Pro" pitchFamily="34" charset="-122"/>
-                <a:cs typeface="Be Vietnam Pro" pitchFamily="34" charset="-120"/>
-              </a:rPr>
-              <a:t> lớp</a:t>
-            </a:r>
-            <a:r>
-              <a:rPr lang="en-US" sz="2850" dirty="0" spc="-9" kern="0">
-                <a:solidFill>
-                  <a:srgbClr val="14161C"/>
-                </a:solidFill>
-                <a:latin typeface="Be Vietnam Pro" pitchFamily="34" charset="0"/>
-                <a:ea typeface="Be Vietnam Pro" pitchFamily="34" charset="-122"/>
-                <a:cs typeface="Be Vietnam Pro" pitchFamily="34" charset="-120"/>
-              </a:rPr>
-              <a:t> một</a:t>
-            </a:r>
-            <a:r>
-              <a:rPr lang="en-US" sz="2850" dirty="0" spc="7" kern="0">
-                <a:solidFill>
-                  <a:srgbClr val="14161C"/>
-                </a:solidFill>
-                <a:latin typeface="Be Vietnam Pro" pitchFamily="34" charset="0"/>
-                <a:ea typeface="Be Vietnam Pro" pitchFamily="34" charset="-122"/>
-                <a:cs typeface="Be Vietnam Pro" pitchFamily="34" charset="-120"/>
-              </a:rPr>
-              <a:t> trước.</a:t>
+              <a:t> bài</a:t>
+            </a:r>
+            <a:r>
+              <a:rPr lang="en-US" sz="2850" dirty="0" spc="-8" kern="0">
+                <a:solidFill>
+                  <a:srgbClr val="14161C"/>
+                </a:solidFill>
+                <a:latin typeface="Be Vietnam Pro" pitchFamily="34" charset="0"/>
+                <a:ea typeface="Be Vietnam Pro" pitchFamily="34" charset="-122"/>
+                <a:cs typeface="Be Vietnam Pro" pitchFamily="34" charset="-120"/>
+              </a:rPr>
+              <a:t> này.</a:t>
             </a:r>
             <a:endParaRPr lang="en-US" sz="2850" dirty="0"/>
           </a:p>

--- a/system-design-101/vi/lessons/sd-02-007/slides/sd-02-007.pptx
+++ b/system-design-101/vi/lessons/sd-02-007/slides/sd-02-007.pptx
@@ -8876,7 +8876,7 @@
               <a:buNone/>
             </a:pPr>
             <a:r>
-              <a:rPr lang="en-US" sz="6900" dirty="0" spc="4" kern="0">
+              <a:rPr lang="en-US" sz="6900" dirty="0" spc="6" kern="0">
                 <a:solidFill>
                   <a:srgbClr val="14161C"/>
                 </a:solidFill>
@@ -8884,10 +8884,10 @@
                 <a:ea typeface="Bricolage Grotesque ExtraBold" pitchFamily="34" charset="-122"/>
                 <a:cs typeface="Bricolage Grotesque ExtraBold" pitchFamily="34" charset="-120"/>
               </a:rPr>
-              <a:t>Kiểm</a:t>
-            </a:r>
-            <a:r>
-              <a:rPr lang="en-US" sz="6900" dirty="0" spc="-30" kern="0">
+              <a:t>Cổng:</a:t>
+            </a:r>
+            <a:r>
+              <a:rPr lang="en-US" sz="6900" dirty="0" spc="-36" kern="0">
                 <a:solidFill>
                   <a:srgbClr val="14161C"/>
                 </a:solidFill>
@@ -8895,10 +8895,10 @@
                 <a:ea typeface="Bricolage Grotesque ExtraBold" pitchFamily="34" charset="-122"/>
                 <a:cs typeface="Bricolage Grotesque ExtraBold" pitchFamily="34" charset="-120"/>
               </a:rPr>
-              <a:t> tra</a:t>
-            </a:r>
-            <a:r>
-              <a:rPr lang="en-US" sz="6900" dirty="0" spc="-79" kern="0">
+              <a:t> xác</a:t>
+            </a:r>
+            <a:r>
+              <a:rPr lang="en-US" sz="6900" dirty="0" spc="-57" kern="0">
                 <a:solidFill>
                   <a:srgbClr val="14161C"/>
                 </a:solidFill>
@@ -8906,10 +8906,10 @@
                 <a:ea typeface="Bricolage Grotesque ExtraBold" pitchFamily="34" charset="-122"/>
                 <a:cs typeface="Bricolage Grotesque ExtraBold" pitchFamily="34" charset="-120"/>
               </a:rPr>
-              <a:t> trước</a:t>
-            </a:r>
-            <a:r>
-              <a:rPr lang="en-US" sz="6900" dirty="0" spc="0" kern="0">
+              <a:t> thực</a:t>
+            </a:r>
+            <a:r>
+              <a:rPr lang="en-US" sz="6900" dirty="0" spc="-75" kern="0">
                 <a:solidFill>
                   <a:srgbClr val="14161C"/>
                 </a:solidFill>
@@ -8917,10 +8917,10 @@
                 <a:ea typeface="Bricolage Grotesque ExtraBold" pitchFamily="34" charset="-122"/>
                 <a:cs typeface="Bricolage Grotesque ExtraBold" pitchFamily="34" charset="-120"/>
               </a:rPr>
-              <a:t> khi</a:t>
-            </a:r>
-            <a:r>
-              <a:rPr lang="en-US" sz="6900" dirty="0" spc="-57" kern="0">
+              <a:t> và</a:t>
+            </a:r>
+            <a:r>
+              <a:rPr lang="en-US" sz="6900" dirty="0" spc="3" kern="0">
                 <a:solidFill>
                   <a:srgbClr val="14161C"/>
                 </a:solidFill>
@@ -8928,7 +8928,7 @@
                 <a:ea typeface="Bricolage Grotesque ExtraBold" pitchFamily="34" charset="-122"/>
                 <a:cs typeface="Bricolage Grotesque ExtraBold" pitchFamily="34" charset="-120"/>
               </a:rPr>
-              <a:t> vào</a:t>
+              <a:t> phân quyền</a:t>
             </a:r>
             <a:endParaRPr lang="en-US" sz="6900" dirty="0"/>
           </a:p>
@@ -9489,6 +9489,17 @@
               <a:buNone/>
             </a:pPr>
             <a:r>
+              <a:rPr lang="en-US" sz="2550" dirty="0" spc="2" kern="0">
+                <a:solidFill>
+                  <a:srgbClr val="14161C"/>
+                </a:solidFill>
+                <a:latin typeface="Be Vietnam Pro" pitchFamily="34" charset="0"/>
+                <a:ea typeface="Be Vietnam Pro" pitchFamily="34" charset="-122"/>
+                <a:cs typeface="Be Vietnam Pro" pitchFamily="34" charset="-120"/>
+              </a:rPr>
+              <a:t>Nguồn</a:t>
+            </a:r>
+            <a:r>
               <a:rPr lang="en-US" sz="2550" dirty="0" spc="0" kern="0">
                 <a:solidFill>
                   <a:srgbClr val="14161C"/>
@@ -9497,10 +9508,10 @@
                 <a:ea typeface="Be Vietnam Pro" pitchFamily="34" charset="-122"/>
                 <a:cs typeface="Be Vietnam Pro" pitchFamily="34" charset="-120"/>
               </a:rPr>
-              <a:t>Ai</a:t>
-            </a:r>
-            <a:r>
-              <a:rPr lang="en-US" sz="2550" dirty="0" spc="40" kern="0">
+              <a:t> không nói</a:t>
+            </a:r>
+            <a:r>
+              <a:rPr lang="en-US" sz="2550" dirty="0" spc="-4" kern="0">
                 <a:solidFill>
                   <a:srgbClr val="14161C"/>
                 </a:solidFill>
@@ -9508,10 +9519,10 @@
                 <a:ea typeface="Be Vietnam Pro" pitchFamily="34" charset="-122"/>
                 <a:cs typeface="Be Vietnam Pro" pitchFamily="34" charset="-120"/>
               </a:rPr>
-              <a:t> gửi</a:t>
-            </a:r>
-            <a:r>
-              <a:rPr lang="en-US" sz="2550" dirty="0" spc="-4" kern="0">
+              <a:t> sự</a:t>
+            </a:r>
+            <a:r>
+              <a:rPr lang="en-US" sz="2550" dirty="0" spc="0" kern="0">
                 <a:solidFill>
                   <a:srgbClr val="14161C"/>
                 </a:solidFill>
@@ -9519,10 +9530,10 @@
                 <a:ea typeface="Be Vietnam Pro" pitchFamily="34" charset="-122"/>
                 <a:cs typeface="Be Vietnam Pro" pitchFamily="34" charset="-120"/>
               </a:rPr>
-              <a:t> sự</a:t>
-            </a:r>
-            <a:r>
-              <a:rPr lang="en-US" sz="2550" dirty="0" spc="0" kern="0">
+              <a:t> kiện nào phải</a:t>
+            </a:r>
+            <a:r>
+              <a:rPr lang="en-US" sz="2550" dirty="0" spc="1" kern="0">
                 <a:solidFill>
                   <a:srgbClr val="14161C"/>
                 </a:solidFill>
@@ -9530,106 +9541,7 @@
                 <a:ea typeface="Be Vietnam Pro" pitchFamily="34" charset="-122"/>
                 <a:cs typeface="Be Vietnam Pro" pitchFamily="34" charset="-120"/>
               </a:rPr>
-              <a:t> kiện</a:t>
-            </a:r>
-            <a:r>
-              <a:rPr lang="en-US" sz="2550" dirty="0" spc="-8" kern="0">
-                <a:solidFill>
-                  <a:srgbClr val="14161C"/>
-                </a:solidFill>
-                <a:latin typeface="Be Vietnam Pro" pitchFamily="34" charset="0"/>
-                <a:ea typeface="Be Vietnam Pro" pitchFamily="34" charset="-122"/>
-                <a:cs typeface="Be Vietnam Pro" pitchFamily="34" charset="-120"/>
-              </a:rPr>
-              <a:t> này,</a:t>
-            </a:r>
-            <a:r>
-              <a:rPr lang="en-US" sz="2550" dirty="0" spc="-18" kern="0">
-                <a:solidFill>
-                  <a:srgbClr val="14161C"/>
-                </a:solidFill>
-                <a:latin typeface="Be Vietnam Pro" pitchFamily="34" charset="0"/>
-                <a:ea typeface="Be Vietnam Pro" pitchFamily="34" charset="-122"/>
-                <a:cs typeface="Be Vietnam Pro" pitchFamily="34" charset="-120"/>
-              </a:rPr>
-              <a:t> và</a:t>
-            </a:r>
-            <a:r>
-              <a:rPr lang="en-US" sz="2550" dirty="0" spc="-1" kern="0">
-                <a:solidFill>
-                  <a:srgbClr val="14161C"/>
-                </a:solidFill>
-                <a:latin typeface="Be Vietnam Pro" pitchFamily="34" charset="0"/>
-                <a:ea typeface="Be Vietnam Pro" pitchFamily="34" charset="-122"/>
-                <a:cs typeface="Be Vietnam Pro" pitchFamily="34" charset="-120"/>
-              </a:rPr>
-              <a:t> họ</a:t>
-            </a:r>
-            <a:r>
-              <a:rPr lang="en-US" sz="2550" dirty="0" spc="0" kern="0">
-                <a:solidFill>
-                  <a:srgbClr val="14161C"/>
-                </a:solidFill>
-                <a:latin typeface="Be Vietnam Pro" pitchFamily="34" charset="0"/>
-                <a:ea typeface="Be Vietnam Pro" pitchFamily="34" charset="-122"/>
-                <a:cs typeface="Be Vietnam Pro" pitchFamily="34" charset="-120"/>
-              </a:rPr>
-              <a:t> có</a:t>
-            </a:r>
-            <a:r>
-              <a:rPr lang="en-US" sz="2550" dirty="0" spc="7" kern="0">
-                <a:solidFill>
-                  <a:srgbClr val="14161C"/>
-                </a:solidFill>
-                <a:latin typeface="Be Vietnam Pro" pitchFamily="34" charset="0"/>
-                <a:ea typeface="Be Vietnam Pro" pitchFamily="34" charset="-122"/>
-                <a:cs typeface="Be Vietnam Pro" pitchFamily="34" charset="-120"/>
-              </a:rPr>
-              <a:t> được</a:t>
-            </a:r>
-            <a:r>
-              <a:rPr lang="en-US" sz="2550" dirty="0" spc="39" kern="0">
-                <a:solidFill>
-                  <a:srgbClr val="14161C"/>
-                </a:solidFill>
-                <a:latin typeface="Be Vietnam Pro" pitchFamily="34" charset="0"/>
-                <a:ea typeface="Be Vietnam Pro" pitchFamily="34" charset="-122"/>
-                <a:cs typeface="Be Vietnam Pro" pitchFamily="34" charset="-120"/>
-              </a:rPr>
-              <a:t> gửi</a:t>
-            </a:r>
-            <a:r>
-              <a:rPr lang="en-US" sz="2550" dirty="0" spc="-2" kern="0">
-                <a:solidFill>
-                  <a:srgbClr val="14161C"/>
-                </a:solidFill>
-                <a:latin typeface="Be Vietnam Pro" pitchFamily="34" charset="0"/>
-                <a:ea typeface="Be Vietnam Pro" pitchFamily="34" charset="-122"/>
-                <a:cs typeface="Be Vietnam Pro" pitchFamily="34" charset="-120"/>
-              </a:rPr>
-              <a:t> loại</a:t>
-            </a:r>
-            <a:r>
-              <a:rPr lang="en-US" sz="2550" dirty="0" spc="-10" kern="0">
-                <a:solidFill>
-                  <a:srgbClr val="14161C"/>
-                </a:solidFill>
-                <a:latin typeface="Be Vietnam Pro" pitchFamily="34" charset="0"/>
-                <a:ea typeface="Be Vietnam Pro" pitchFamily="34" charset="-122"/>
-                <a:cs typeface="Be Vietnam Pro" pitchFamily="34" charset="-120"/>
-              </a:rPr>
-              <a:t> này</a:t>
-            </a:r>
-            <a:r>
-              <a:rPr lang="en-US" sz="2550" dirty="0" spc="0" kern="0">
-                <a:solidFill>
-                  <a:srgbClr val="14161C"/>
-                </a:solidFill>
-                <a:latin typeface="Be Vietnam Pro" pitchFamily="34" charset="0"/>
-                <a:ea typeface="Be Vietnam Pro" pitchFamily="34" charset="-122"/>
-                <a:cs typeface="Be Vietnam Pro" pitchFamily="34" charset="-120"/>
-              </a:rPr>
-              <a:t> không?</a:t>
+              <a:t> qua cổng.</a:t>
             </a:r>
             <a:endParaRPr lang="en-US" sz="2550" dirty="0"/>
           </a:p>
@@ -14928,7 +14840,7 @@
               <a:buNone/>
             </a:pPr>
             <a:r>
-              <a:rPr lang="en-US" sz="2100" dirty="0" spc="-11" kern="0">
+              <a:rPr lang="en-US" sz="2100" dirty="0" spc="-2" kern="0">
                 <a:solidFill>
                   <a:srgbClr val="6B6A66"/>
                 </a:solidFill>
@@ -14936,7 +14848,29 @@
                 <a:ea typeface="Be Vietnam Pro" pitchFamily="34" charset="-122"/>
                 <a:cs typeface="Be Vietnam Pro" pitchFamily="34" charset="-120"/>
               </a:rPr>
-              <a:t>Phát</a:t>
+              <a:t>Có</a:t>
+            </a:r>
+            <a:r>
+              <a:rPr lang="en-US" sz="2100" dirty="0" spc="0" kern="0">
+                <a:solidFill>
+                  <a:srgbClr val="6B6A66"/>
+                </a:solidFill>
+                <a:latin typeface="Be Vietnam Pro" pitchFamily="34" charset="0"/>
+                <a:ea typeface="Be Vietnam Pro" pitchFamily="34" charset="-122"/>
+                <a:cs typeface="Be Vietnam Pro" pitchFamily="34" charset="-120"/>
+              </a:rPr>
+              <a:t> thể</a:t>
+            </a:r>
+            <a:r>
+              <a:rPr lang="en-US" sz="2100" dirty="0" spc="-12" kern="0">
+                <a:solidFill>
+                  <a:srgbClr val="6B6A66"/>
+                </a:solidFill>
+                <a:latin typeface="Be Vietnam Pro" pitchFamily="34" charset="0"/>
+                <a:ea typeface="Be Vietnam Pro" pitchFamily="34" charset="-122"/>
+                <a:cs typeface="Be Vietnam Pro" pitchFamily="34" charset="-120"/>
+              </a:rPr>
+              <a:t> phát</a:t>
             </a:r>
             <a:r>
               <a:rPr lang="en-US" sz="2100" dirty="0" spc="1" kern="0">
@@ -14947,10 +14881,10 @@
                 <a:ea typeface="Be Vietnam Pro" pitchFamily="34" charset="-122"/>
                 <a:cs typeface="Be Vietnam Pro" pitchFamily="34" charset="-120"/>
               </a:rPr>
-              <a:t> hiện</a:t>
-            </a:r>
-            <a:r>
-              <a:rPr lang="en-US" sz="2100" dirty="0" spc="3" kern="0">
+              <a:t> hiện,</a:t>
+            </a:r>
+            <a:r>
+              <a:rPr lang="en-US" sz="2100" dirty="0" spc="-8" kern="0">
                 <a:solidFill>
                   <a:srgbClr val="6B6A66"/>
                 </a:solidFill>
@@ -14958,21 +14892,10 @@
                 <a:ea typeface="Be Vietnam Pro" pitchFamily="34" charset="-122"/>
                 <a:cs typeface="Be Vietnam Pro" pitchFamily="34" charset="-120"/>
               </a:rPr>
-              <a:t> được,</a:t>
-            </a:r>
-            <a:r>
-              <a:rPr lang="en-US" sz="2100" dirty="0" spc="-8" kern="0">
-                <a:solidFill>
-                  <a:srgbClr val="6B6A66"/>
-                </a:solidFill>
-                <a:latin typeface="Be Vietnam Pro" pitchFamily="34" charset="0"/>
-                <a:ea typeface="Be Vietnam Pro" pitchFamily="34" charset="-122"/>
-                <a:cs typeface="Be Vietnam Pro" pitchFamily="34" charset="-120"/>
-              </a:rPr>
               <a:t> thay</a:t>
             </a:r>
             <a:r>
-              <a:rPr lang="en-US" sz="2100" dirty="0" spc="0" kern="0">
+              <a:rPr lang="en-US" sz="2100" dirty="0" spc="-1" kern="0">
                 <a:solidFill>
                   <a:srgbClr val="6B6A66"/>
                 </a:solidFill>
